--- a/Digimon/디지몬_발표자료.pptx
+++ b/Digimon/디지몬_발표자료.pptx
@@ -1464,10 +1464,10 @@
                 <a:ea typeface="Calibri" pitchFamily="34" charset="-122"/>
                 <a:cs typeface="Calibri" pitchFamily="34" charset="-120"/>
               </a:rPr>
-              <a:t> </a:t>
-            </a:r>
-            <a:r>
-              <a:rPr lang="en-US" altLang="ko-KR" sz="1300" dirty="0" err="1">
+              <a:t>, </a:t>
+            </a:r>
+            <a:r>
+              <a:rPr lang="ko-KR" altLang="en-US" sz="1300" dirty="0">
                 <a:solidFill>
                   <a:srgbClr val="0F0E17"/>
                 </a:solidFill>
@@ -1475,7 +1475,7 @@
                 <a:ea typeface="Calibri" pitchFamily="34" charset="-122"/>
                 <a:cs typeface="Calibri" pitchFamily="34" charset="-120"/>
               </a:rPr>
-              <a:t>달성</a:t>
+              <a:t>최강 디지몬 육성</a:t>
             </a:r>
             <a:endParaRPr lang="en-US" altLang="ko-KR" sz="1300" dirty="0"/>
           </a:p>
@@ -1547,7 +1547,7 @@
                 <a:ea typeface="Calibri" pitchFamily="34" charset="-122"/>
                 <a:cs typeface="Calibri" pitchFamily="34" charset="-120"/>
               </a:rPr>
-              <a:t>먹이</a:t>
+              <a:t>디지몬 케어</a:t>
             </a:r>
             <a:r>
               <a:rPr lang="en-US" altLang="ko-KR" sz="1300" dirty="0">
@@ -1558,6 +1558,50 @@
                 <a:ea typeface="Calibri" pitchFamily="34" charset="-122"/>
                 <a:cs typeface="Calibri" pitchFamily="34" charset="-120"/>
               </a:rPr>
+              <a:t>(</a:t>
+            </a:r>
+            <a:r>
+              <a:rPr lang="ko-KR" altLang="en-US" sz="1300" dirty="0">
+                <a:solidFill>
+                  <a:srgbClr val="0F0E17"/>
+                </a:solidFill>
+                <a:latin typeface="Calibri" pitchFamily="34" charset="0"/>
+                <a:ea typeface="Calibri" pitchFamily="34" charset="-122"/>
+                <a:cs typeface="Calibri" pitchFamily="34" charset="-120"/>
+              </a:rPr>
+              <a:t>핵심</a:t>
+            </a:r>
+            <a:r>
+              <a:rPr lang="en-US" altLang="ko-KR" sz="1300" dirty="0">
+                <a:solidFill>
+                  <a:srgbClr val="0F0E17"/>
+                </a:solidFill>
+                <a:latin typeface="Calibri" pitchFamily="34" charset="0"/>
+                <a:ea typeface="Calibri" pitchFamily="34" charset="-122"/>
+                <a:cs typeface="Calibri" pitchFamily="34" charset="-120"/>
+              </a:rPr>
+              <a:t>), </a:t>
+            </a:r>
+            <a:r>
+              <a:rPr lang="ko-KR" altLang="en-US" sz="1300" dirty="0">
+                <a:solidFill>
+                  <a:srgbClr val="0F0E17"/>
+                </a:solidFill>
+                <a:latin typeface="Calibri" pitchFamily="34" charset="0"/>
+                <a:ea typeface="Calibri" pitchFamily="34" charset="-122"/>
+                <a:cs typeface="Calibri" pitchFamily="34" charset="-120"/>
+              </a:rPr>
+              <a:t>배틀</a:t>
+            </a:r>
+            <a:r>
+              <a:rPr lang="en-US" altLang="ko-KR" sz="1300" dirty="0">
+                <a:solidFill>
+                  <a:srgbClr val="0F0E17"/>
+                </a:solidFill>
+                <a:latin typeface="Calibri" pitchFamily="34" charset="0"/>
+                <a:ea typeface="Calibri" pitchFamily="34" charset="-122"/>
+                <a:cs typeface="Calibri" pitchFamily="34" charset="-120"/>
+              </a:rPr>
               <a:t>, </a:t>
             </a:r>
             <a:r>
@@ -1569,51 +1613,7 @@
                 <a:ea typeface="Calibri" pitchFamily="34" charset="-122"/>
                 <a:cs typeface="Calibri" pitchFamily="34" charset="-120"/>
               </a:rPr>
-              <a:t>훈련</a:t>
-            </a:r>
-            <a:r>
-              <a:rPr lang="en-US" altLang="ko-KR" sz="1300" dirty="0">
-                <a:solidFill>
-                  <a:srgbClr val="0F0E17"/>
-                </a:solidFill>
-                <a:latin typeface="Calibri" pitchFamily="34" charset="0"/>
-                <a:ea typeface="Calibri" pitchFamily="34" charset="-122"/>
-                <a:cs typeface="Calibri" pitchFamily="34" charset="-120"/>
-              </a:rPr>
-              <a:t>, </a:t>
-            </a:r>
-            <a:r>
-              <a:rPr lang="ko-KR" altLang="en-US" sz="1300" dirty="0">
-                <a:solidFill>
-                  <a:srgbClr val="0F0E17"/>
-                </a:solidFill>
-                <a:latin typeface="Calibri" pitchFamily="34" charset="0"/>
-                <a:ea typeface="Calibri" pitchFamily="34" charset="-122"/>
-                <a:cs typeface="Calibri" pitchFamily="34" charset="-120"/>
-              </a:rPr>
-              <a:t>배틀</a:t>
-            </a:r>
-            <a:r>
-              <a:rPr lang="en-US" altLang="ko-KR" sz="1300" dirty="0">
-                <a:solidFill>
-                  <a:srgbClr val="0F0E17"/>
-                </a:solidFill>
-                <a:latin typeface="Calibri" pitchFamily="34" charset="0"/>
-                <a:ea typeface="Calibri" pitchFamily="34" charset="-122"/>
-                <a:cs typeface="Calibri" pitchFamily="34" charset="-120"/>
-              </a:rPr>
-              <a:t>, </a:t>
-            </a:r>
-            <a:r>
-              <a:rPr lang="ko-KR" altLang="en-US" sz="1300" dirty="0">
-                <a:solidFill>
-                  <a:srgbClr val="0F0E17"/>
-                </a:solidFill>
-                <a:latin typeface="Calibri" pitchFamily="34" charset="0"/>
-                <a:ea typeface="Calibri" pitchFamily="34" charset="-122"/>
-                <a:cs typeface="Calibri" pitchFamily="34" charset="-120"/>
-              </a:rPr>
-              <a:t>청소</a:t>
+              <a:t>진화</a:t>
             </a:r>
             <a:endParaRPr lang="en-US" altLang="ko-KR" sz="1300" dirty="0"/>
           </a:p>
@@ -1974,7 +1974,7 @@
         </p:nvSpPr>
         <p:spPr>
           <a:xfrm>
-            <a:off x="548640" y="3874897"/>
+            <a:off x="548640" y="3827780"/>
             <a:ext cx="1188720" cy="411480"/>
           </a:xfrm>
           <a:prstGeom prst="rect">
@@ -1999,7 +1999,7 @@
                 <a:ea typeface="Calibri" pitchFamily="34" charset="-122"/>
                 <a:cs typeface="Calibri" pitchFamily="34" charset="-120"/>
               </a:rPr>
-              <a:t>원작</a:t>
+              <a:t>출력</a:t>
             </a:r>
             <a:endParaRPr lang="en-US" sz="1300" dirty="0"/>
           </a:p>
@@ -2019,7 +2019,94 @@
         </p:nvSpPr>
         <p:spPr>
           <a:xfrm>
-            <a:off x="1828800" y="3874897"/>
+            <a:off x="1828800" y="3827780"/>
+            <a:ext cx="2286000" cy="411480"/>
+          </a:xfrm>
+          <a:prstGeom prst="rect">
+            <a:avLst/>
+          </a:prstGeom>
+          <a:noFill/>
+          <a:ln/>
+        </p:spPr>
+        <p:txBody>
+          <a:bodyPr wrap="square" rtlCol="0" anchor="ctr"/>
+          <a:lstStyle/>
+          <a:p>
+            <a:pPr marL="0" indent="0">
+              <a:buNone/>
+            </a:pPr>
+            <a:r>
+              <a:rPr lang="ko-KR" altLang="en-US" sz="1300" dirty="0">
+                <a:solidFill>
+                  <a:srgbClr val="0F0E17"/>
+                </a:solidFill>
+                <a:latin typeface="Calibri" pitchFamily="34" charset="0"/>
+                <a:ea typeface="Calibri" pitchFamily="34" charset="-122"/>
+                <a:cs typeface="Calibri" pitchFamily="34" charset="-120"/>
+              </a:rPr>
+              <a:t>픽셀아트</a:t>
+            </a:r>
+            <a:endParaRPr lang="en-US" sz="1300" dirty="0"/>
+          </a:p>
+        </p:txBody>
+      </p:sp>
+      <p:sp>
+        <p:nvSpPr>
+          <p:cNvPr id="3" name="Text 5">
+            <a:extLst>
+              <a:ext uri="{FF2B5EF4-FFF2-40B4-BE49-F238E27FC236}">
+                <a16:creationId xmlns:a16="http://schemas.microsoft.com/office/drawing/2014/main" id="{02CF139B-0276-D579-7F5C-FE04DC23D171}"/>
+              </a:ext>
+            </a:extLst>
+          </p:cNvPr>
+          <p:cNvSpPr/>
+          <p:nvPr/>
+        </p:nvSpPr>
+        <p:spPr>
+          <a:xfrm>
+            <a:off x="548640" y="4350385"/>
+            <a:ext cx="1188720" cy="411480"/>
+          </a:xfrm>
+          <a:prstGeom prst="rect">
+            <a:avLst/>
+          </a:prstGeom>
+          <a:noFill/>
+          <a:ln/>
+        </p:spPr>
+        <p:txBody>
+          <a:bodyPr wrap="square" rtlCol="0" anchor="ctr"/>
+          <a:lstStyle/>
+          <a:p>
+            <a:r>
+              <a:rPr lang="ko-KR" altLang="en-US" sz="1300" b="1" dirty="0">
+                <a:solidFill>
+                  <a:srgbClr val="6B7280"/>
+                </a:solidFill>
+                <a:latin typeface="Calibri" pitchFamily="34" charset="0"/>
+                <a:ea typeface="Calibri" pitchFamily="34" charset="-122"/>
+                <a:cs typeface="Calibri" pitchFamily="34" charset="-120"/>
+              </a:rPr>
+              <a:t>원작</a:t>
+            </a:r>
+            <a:endParaRPr lang="en-US" altLang="ko-KR" sz="1300" dirty="0"/>
+          </a:p>
+        </p:txBody>
+      </p:sp>
+      <p:sp>
+        <p:nvSpPr>
+          <p:cNvPr id="9" name="Text 12">
+            <a:extLst>
+              <a:ext uri="{FF2B5EF4-FFF2-40B4-BE49-F238E27FC236}">
+                <a16:creationId xmlns:a16="http://schemas.microsoft.com/office/drawing/2014/main" id="{9E9A9D7C-0CE9-BA06-88E4-056378FA3C23}"/>
+              </a:ext>
+            </a:extLst>
+          </p:cNvPr>
+          <p:cNvSpPr/>
+          <p:nvPr/>
+        </p:nvSpPr>
+        <p:spPr>
+          <a:xfrm>
+            <a:off x="1828800" y="4349115"/>
             <a:ext cx="2286000" cy="411480"/>
           </a:xfrm>
           <a:prstGeom prst="rect">
@@ -2526,7 +2613,7 @@
               <a:buNone/>
             </a:pPr>
             <a:r>
-              <a:rPr lang="en-US" sz="1100" b="1" dirty="0">
+              <a:rPr lang="ko-KR" altLang="en-US" sz="1100" b="1" dirty="0">
                 <a:solidFill>
                   <a:srgbClr val="2563EB"/>
                 </a:solidFill>
@@ -2534,7 +2621,7 @@
                 <a:ea typeface="Calibri" pitchFamily="34" charset="-122"/>
                 <a:cs typeface="Calibri" pitchFamily="34" charset="-120"/>
               </a:rPr>
-              <a:t>10분 무응답 → 케어미스</a:t>
+              <a:t>시간 경과에 따른 수치 변화</a:t>
             </a:r>
             <a:endParaRPr lang="en-US" sz="1100" dirty="0"/>
           </a:p>
@@ -3118,7 +3205,7 @@
               <a:t>·  </a:t>
             </a:r>
             <a:r>
-              <a:rPr lang="en-US" sz="1250" dirty="0">
+              <a:rPr lang="ko-KR" altLang="en-US" sz="1250" dirty="0">
                 <a:solidFill>
                   <a:srgbClr val="374151"/>
                 </a:solidFill>
@@ -3126,7 +3213,7 @@
                 <a:ea typeface="Calibri" pitchFamily="34" charset="-122"/>
                 <a:cs typeface="Calibri" pitchFamily="34" charset="-120"/>
               </a:rPr>
-              <a:t>배고픔 0 → 12시간 후 사망</a:t>
+              <a:t>케어 미스 쌓임</a:t>
             </a:r>
             <a:endParaRPr lang="en-US" sz="1250" dirty="0"/>
           </a:p>
@@ -3141,6 +3228,64 @@
         <p:spPr>
           <a:xfrm>
             <a:off x="6163056" y="2496312"/>
+            <a:ext cx="2423160" cy="402336"/>
+          </a:xfrm>
+          <a:prstGeom prst="rect">
+            <a:avLst/>
+          </a:prstGeom>
+          <a:noFill/>
+          <a:ln/>
+        </p:spPr>
+        <p:txBody>
+          <a:bodyPr wrap="square" rtlCol="0" anchor="ctr"/>
+          <a:lstStyle/>
+          <a:p>
+            <a:r>
+              <a:rPr lang="en-US" altLang="ko-KR" sz="1250" b="1" dirty="0">
+                <a:solidFill>
+                  <a:srgbClr val="DC2626"/>
+                </a:solidFill>
+                <a:latin typeface="Calibri" pitchFamily="34" charset="0"/>
+                <a:ea typeface="Calibri" pitchFamily="34" charset="-122"/>
+                <a:cs typeface="Calibri" pitchFamily="34" charset="-120"/>
+              </a:rPr>
+              <a:t>·  </a:t>
+            </a:r>
+            <a:r>
+              <a:rPr lang="ko-KR" altLang="en-US" sz="1250" dirty="0">
+                <a:solidFill>
+                  <a:srgbClr val="374151"/>
+                </a:solidFill>
+                <a:latin typeface="Calibri" pitchFamily="34" charset="0"/>
+                <a:ea typeface="Calibri" pitchFamily="34" charset="-122"/>
+                <a:cs typeface="Calibri" pitchFamily="34" charset="-120"/>
+              </a:rPr>
+              <a:t>방치 시 발병</a:t>
+            </a:r>
+            <a:r>
+              <a:rPr lang="en-US" sz="1250" b="1" dirty="0">
+                <a:solidFill>
+                  <a:srgbClr val="DC2626"/>
+                </a:solidFill>
+                <a:latin typeface="Calibri" pitchFamily="34" charset="0"/>
+                <a:ea typeface="Calibri" pitchFamily="34" charset="-122"/>
+                <a:cs typeface="Calibri" pitchFamily="34" charset="-120"/>
+              </a:rPr>
+              <a:t>  </a:t>
+            </a:r>
+            <a:endParaRPr lang="en-US" sz="1250" dirty="0"/>
+          </a:p>
+        </p:txBody>
+      </p:sp>
+      <p:sp>
+        <p:nvSpPr>
+          <p:cNvPr id="28" name="Text 26"/>
+          <p:cNvSpPr/>
+          <p:nvPr/>
+        </p:nvSpPr>
+        <p:spPr>
+          <a:xfrm>
+            <a:off x="6163056" y="2990088"/>
             <a:ext cx="2423160" cy="402336"/>
           </a:xfrm>
           <a:prstGeom prst="rect">
@@ -3168,7 +3313,7 @@
               <a:t>·  </a:t>
             </a:r>
             <a:r>
-              <a:rPr lang="en-US" sz="1250" dirty="0">
+              <a:rPr lang="ko-KR" altLang="en-US" sz="1250" dirty="0">
                 <a:solidFill>
                   <a:srgbClr val="374151"/>
                 </a:solidFill>
@@ -3176,57 +3321,7 @@
                 <a:ea typeface="Calibri" pitchFamily="34" charset="-122"/>
                 <a:cs typeface="Calibri" pitchFamily="34" charset="-120"/>
               </a:rPr>
-              <a:t>케어미스 20회 → 사망</a:t>
-            </a:r>
-            <a:endParaRPr lang="en-US" sz="1250" dirty="0"/>
-          </a:p>
-        </p:txBody>
-      </p:sp>
-      <p:sp>
-        <p:nvSpPr>
-          <p:cNvPr id="28" name="Text 26"/>
-          <p:cNvSpPr/>
-          <p:nvPr/>
-        </p:nvSpPr>
-        <p:spPr>
-          <a:xfrm>
-            <a:off x="6163056" y="2990088"/>
-            <a:ext cx="2423160" cy="402336"/>
-          </a:xfrm>
-          <a:prstGeom prst="rect">
-            <a:avLst/>
-          </a:prstGeom>
-          <a:noFill/>
-          <a:ln/>
-        </p:spPr>
-        <p:txBody>
-          <a:bodyPr wrap="square" rtlCol="0" anchor="ctr"/>
-          <a:lstStyle/>
-          <a:p>
-            <a:pPr marL="0" indent="0">
-              <a:buNone/>
-            </a:pPr>
-            <a:r>
-              <a:rPr lang="en-US" sz="1250" b="1" dirty="0">
-                <a:solidFill>
-                  <a:srgbClr val="DC2626"/>
-                </a:solidFill>
-                <a:latin typeface="Calibri" pitchFamily="34" charset="0"/>
-                <a:ea typeface="Calibri" pitchFamily="34" charset="-122"/>
-                <a:cs typeface="Calibri" pitchFamily="34" charset="-120"/>
-              </a:rPr>
-              <a:t>·  </a:t>
-            </a:r>
-            <a:r>
-              <a:rPr lang="ko-KR" altLang="en-US" sz="1250" dirty="0">
-                <a:solidFill>
-                  <a:srgbClr val="374151"/>
-                </a:solidFill>
-                <a:latin typeface="Calibri" pitchFamily="34" charset="0"/>
-                <a:ea typeface="Calibri" pitchFamily="34" charset="-122"/>
-                <a:cs typeface="Calibri" pitchFamily="34" charset="-120"/>
-              </a:rPr>
-              <a:t>방치 시 발병</a:t>
+              <a:t>사망조건 충족 시 사망</a:t>
             </a:r>
             <a:endParaRPr lang="en-US" sz="1250" dirty="0"/>
           </a:p>
